--- a/courses/俄语课件/俄语_Day4_L1.pptx
+++ b/courses/俄语课件/俄语_Day4_L1.pptx
@@ -9,7 +9,6 @@
     <p:sldId id="257" r:id="rId8"/>
     <p:sldId id="258" r:id="rId9"/>
     <p:sldId id="259" r:id="rId10"/>
-    <p:sldId id="260" r:id="rId11"/>
   </p:sldIdLst>
   <p:sldSz cx="9144000" cy="6858000" type="screen4x3"/>
   <p:notesSz cx="6858000" cy="9144000"/>
@@ -3200,66 +3199,14 @@
               </a:defRPr>
             </a:pPr>
             <a:r>
-              <a:t>名词第5格</a:t>
-            </a:r>
-          </a:p>
-        </p:txBody>
-      </p:sp>
-      <p:sp>
-        <p:nvSpPr>
-          <p:cNvPr id="5" name="Rounded Rectangle 4"/>
-          <p:cNvSpPr/>
-          <p:nvPr/>
-        </p:nvSpPr>
-        <p:spPr>
-          <a:xfrm>
-            <a:off x="1828800" y="4572000"/>
-            <a:ext cx="5486400" cy="731520"/>
-          </a:xfrm>
-          <a:prstGeom prst="roundRect">
-            <a:avLst/>
-          </a:prstGeom>
-          <a:solidFill>
-            <a:srgbClr val="4682B4"/>
-          </a:solidFill>
-          <a:ln>
-            <a:noFill/>
-          </a:ln>
-        </p:spPr>
-        <p:style>
-          <a:lnRef idx="1">
-            <a:schemeClr val="accent1"/>
-          </a:lnRef>
-          <a:fillRef idx="3">
-            <a:schemeClr val="accent1"/>
-          </a:fillRef>
-          <a:effectRef idx="2">
-            <a:schemeClr val="accent1"/>
-          </a:effectRef>
-          <a:fontRef idx="minor">
-            <a:schemeClr val="lt1"/>
-          </a:fontRef>
-        </p:style>
-        <p:txBody>
-          <a:bodyPr rtlCol="0" anchor="ctr"/>
-          <a:lstStyle/>
-          <a:p>
-            <a:pPr algn="ctr">
-              <a:defRPr sz="2200">
-                <a:solidFill>
-                  <a:srgbClr val="FFFFFF"/>
-                </a:solidFill>
-              </a:defRPr>
-            </a:pPr>
-            <a:r>
-              <a:t>Tvoritelny padesh</a:t>
-            </a:r>
-          </a:p>
-        </p:txBody>
-      </p:sp>
-      <p:sp>
-        <p:nvSpPr>
-          <p:cNvPr id="6" name="TextBox 5"/>
+              <a:t>名词第5格（用什么）</a:t>
+            </a:r>
+          </a:p>
+        </p:txBody>
+      </p:sp>
+      <p:sp>
+        <p:nvSpPr>
+          <p:cNvPr id="5" name="TextBox 4"/>
           <p:cNvSpPr txBox="1"/>
           <p:nvPr/>
         </p:nvSpPr>
@@ -3287,7 +3234,7 @@
               </a:defRPr>
             </a:pPr>
             <a:r>
-              <a:t>Day4/84</a:t>
+              <a:t>День 4/84</a:t>
             </a:r>
           </a:p>
         </p:txBody>
@@ -3418,7 +3365,7 @@
               </a:defRPr>
             </a:pPr>
             <a:r>
-              <a:t>Tvoritelny padesh</a:t>
+              <a:t>Творительный падеж</a:t>
             </a:r>
           </a:p>
         </p:txBody>
@@ -3453,7 +3400,7 @@
               </a:defRPr>
             </a:pPr>
             <a:r>
-              <a:t>第5格 = 工具格，表示'用什么/和谁一起'</a:t>
+              <a:t>第5格 = 工具格，表示«用什么/和谁一起»</a:t>
             </a:r>
           </a:p>
         </p:txBody>
@@ -3488,7 +3435,7 @@
               </a:defRPr>
             </a:pPr>
             <a:r>
-              <a:t>Ya pishu ruchkoy. = 我用笔写字。</a:t>
+              <a:t>Я пишу ручкой. = 我用笔写字。</a:t>
             </a:r>
           </a:p>
         </p:txBody>
@@ -3540,7 +3487,7 @@
               </a:defRPr>
             </a:pPr>
             <a:r>
-              <a:t>On idyot s drugom. = 他和朋友一起走。</a:t>
+              <a:t>Он идёт с другом. = 他和朋友一起走。</a:t>
             </a:r>
           </a:p>
         </p:txBody>
@@ -3592,7 +3539,7 @@
               </a:defRPr>
             </a:pPr>
             <a:r>
-              <a:t>第5格回答问题：kem? chem? (用谁？用什么？)</a:t>
+              <a:t>第5格回答问题：кем? чем? (用谁？用什么？)</a:t>
             </a:r>
           </a:p>
         </p:txBody>
@@ -3627,7 +3574,7 @@
               </a:defRPr>
             </a:pPr>
             <a:r>
-              <a:t>Day4/84</a:t>
+              <a:t>День 4/84</a:t>
             </a:r>
           </a:p>
         </p:txBody>
@@ -3758,7 +3705,7 @@
               </a:defRPr>
             </a:pPr>
             <a:r>
-              <a:t>Sklonenie</a:t>
+              <a:t>Склонение</a:t>
             </a:r>
           </a:p>
         </p:txBody>
@@ -3828,7 +3775,7 @@
               </a:defRPr>
             </a:pPr>
             <a:r>
-              <a:t>student &gt; studentom (用学生)</a:t>
+              <a:t>студдент → студентом (用学生)</a:t>
             </a:r>
           </a:p>
         </p:txBody>
@@ -3863,7 +3810,7 @@
               </a:defRPr>
             </a:pPr>
             <a:r>
-              <a:t>okno &gt; oknom (用窗户)</a:t>
+              <a:t>окно → окном (用窗户)</a:t>
             </a:r>
           </a:p>
         </p:txBody>
@@ -3933,7 +3880,7 @@
               </a:defRPr>
             </a:pPr>
             <a:r>
-              <a:t>kniga &gt; knigoy (用书)</a:t>
+              <a:t>книга → книгой (用书)</a:t>
             </a:r>
           </a:p>
         </p:txBody>
@@ -3968,7 +3915,7 @@
               </a:defRPr>
             </a:pPr>
             <a:r>
-              <a:t>devushka &gt; devushkoy (和姑娘一起)</a:t>
+              <a:t>девушка → девушкой (和姑娘一起)</a:t>
             </a:r>
           </a:p>
         </p:txBody>
@@ -4020,7 +3967,7 @@
               </a:defRPr>
             </a:pPr>
             <a:r>
-              <a:t>规律：加 -om 或 -oy</a:t>
+              <a:t>规律：加 -ом 或 -ой</a:t>
             </a:r>
           </a:p>
         </p:txBody>
@@ -4055,7 +4002,7 @@
               </a:defRPr>
             </a:pPr>
             <a:r>
-              <a:t>Day4/84</a:t>
+              <a:t>День 4/84</a:t>
             </a:r>
           </a:p>
         </p:txBody>
@@ -4151,7 +4098,7 @@
               </a:defRPr>
             </a:pPr>
             <a:r>
-              <a:t>三、第5格与动词搭配</a:t>
+              <a:t>三、课后练习</a:t>
             </a:r>
           </a:p>
         </p:txBody>
@@ -4186,7 +4133,7 @@
               </a:defRPr>
             </a:pPr>
             <a:r>
-              <a:t>Glagoly</a:t>
+              <a:t>Упражнения</a:t>
             </a:r>
           </a:p>
         </p:txBody>
@@ -4214,14 +4161,14 @@
           <a:lstStyle/>
           <a:p>
             <a:pPr>
-              <a:defRPr sz="1600" b="1">
-                <a:solidFill>
-                  <a:srgbClr val="1E3C72"/>
+              <a:defRPr sz="1500">
+                <a:solidFill>
+                  <a:srgbClr val="333333"/>
                 </a:solidFill>
               </a:defRPr>
             </a:pPr>
             <a:r>
-              <a:t>常用动词：</a:t>
+              <a:t>1. 将下列名词变为第5格：</a:t>
             </a:r>
           </a:p>
         </p:txBody>
@@ -4234,7 +4181,7 @@
         </p:nvSpPr>
         <p:spPr>
           <a:xfrm>
-            <a:off x="457200" y="1828800"/>
+            <a:off x="457200" y="1847088"/>
             <a:ext cx="8229600" cy="365760"/>
           </a:xfrm>
           <a:prstGeom prst="rect">
@@ -4256,7 +4203,7 @@
               </a:defRPr>
             </a:pPr>
             <a:r>
-              <a:t>stat (站在) + 第5格</a:t>
+              <a:t>   дом, книга, друг, окно</a:t>
             </a:r>
           </a:p>
         </p:txBody>
@@ -4269,7 +4216,7 @@
         </p:nvSpPr>
         <p:spPr>
           <a:xfrm>
-            <a:off x="457200" y="2212848"/>
+            <a:off x="457200" y="2231136"/>
             <a:ext cx="8229600" cy="365760"/>
           </a:xfrm>
           <a:prstGeom prst="rect">
@@ -4290,9 +4237,6 @@
                 </a:solidFill>
               </a:defRPr>
             </a:pPr>
-            <a:r>
-              <a:t>saditsya (坐在) + 第5格</a:t>
-            </a:r>
           </a:p>
         </p:txBody>
       </p:sp>
@@ -4304,7 +4248,7 @@
         </p:nvSpPr>
         <p:spPr>
           <a:xfrm>
-            <a:off x="457200" y="2596896"/>
+            <a:off x="457200" y="2615184"/>
             <a:ext cx="8229600" cy="365760"/>
           </a:xfrm>
           <a:prstGeom prst="rect">
@@ -4326,125 +4270,21 @@
               </a:defRPr>
             </a:pPr>
             <a:r>
-              <a:t>gorit (燃烧) + 第5格</a:t>
-            </a:r>
-          </a:p>
-        </p:txBody>
-      </p:sp>
-      <p:sp>
-        <p:nvSpPr>
-          <p:cNvPr id="9" name="Rounded Rectangle 8"/>
-          <p:cNvSpPr/>
-          <p:nvPr/>
-        </p:nvSpPr>
-        <p:spPr>
-          <a:xfrm>
-            <a:off x="457200" y="2980944"/>
-            <a:ext cx="8229600" cy="502920"/>
-          </a:xfrm>
-          <a:prstGeom prst="roundRect">
-            <a:avLst/>
-          </a:prstGeom>
-          <a:solidFill>
-            <a:srgbClr val="4682B4"/>
-          </a:solidFill>
-          <a:ln>
-            <a:noFill/>
-          </a:ln>
-        </p:spPr>
-        <p:style>
-          <a:lnRef idx="1">
-            <a:schemeClr val="accent1"/>
-          </a:lnRef>
-          <a:fillRef idx="3">
-            <a:schemeClr val="accent1"/>
-          </a:fillRef>
-          <a:effectRef idx="2">
-            <a:schemeClr val="accent1"/>
-          </a:effectRef>
-          <a:fontRef idx="minor">
-            <a:schemeClr val="lt1"/>
-          </a:fontRef>
-        </p:style>
-        <p:txBody>
-          <a:bodyPr rtlCol="0" anchor="ctr" wrap="square"/>
-          <a:lstStyle/>
-          <a:p>
-            <a:pPr algn="ctr">
-              <a:defRPr sz="1500">
-                <a:solidFill>
-                  <a:srgbClr val="FFFFFF"/>
-                </a:solidFill>
-              </a:defRPr>
-            </a:pPr>
-            <a:r>
-              <a:t>Kniga lezhit na stole. = 书在桌子上。</a:t>
-            </a:r>
-          </a:p>
-        </p:txBody>
-      </p:sp>
-      <p:sp>
-        <p:nvSpPr>
-          <p:cNvPr id="10" name="Rounded Rectangle 9"/>
-          <p:cNvSpPr/>
-          <p:nvPr/>
-        </p:nvSpPr>
-        <p:spPr>
-          <a:xfrm>
-            <a:off x="457200" y="3621024"/>
-            <a:ext cx="8229600" cy="457200"/>
-          </a:xfrm>
-          <a:prstGeom prst="roundRect">
-            <a:avLst/>
-          </a:prstGeom>
-          <a:solidFill>
-            <a:srgbClr val="B48C32"/>
-          </a:solidFill>
-          <a:ln>
-            <a:noFill/>
-          </a:ln>
-        </p:spPr>
-        <p:style>
-          <a:lnRef idx="1">
-            <a:schemeClr val="accent1"/>
-          </a:lnRef>
-          <a:fillRef idx="3">
-            <a:schemeClr val="accent1"/>
-          </a:fillRef>
-          <a:effectRef idx="2">
-            <a:schemeClr val="accent1"/>
-          </a:effectRef>
-          <a:fontRef idx="minor">
-            <a:schemeClr val="lt1"/>
-          </a:fontRef>
-        </p:style>
-        <p:txBody>
-          <a:bodyPr rtlCol="0" anchor="ctr" wrap="square"/>
-          <a:lstStyle/>
-          <a:p>
-            <a:pPr algn="ctr">
-              <a:defRPr sz="1400">
-                <a:solidFill>
-                  <a:srgbClr val="FFFFFF"/>
-                </a:solidFill>
-              </a:defRPr>
-            </a:pPr>
-            <a:r>
-              <a:t>注意：на + 第6格 = 在...上面</a:t>
-            </a:r>
-          </a:p>
-        </p:txBody>
-      </p:sp>
-      <p:sp>
-        <p:nvSpPr>
-          <p:cNvPr id="11" name="TextBox 10"/>
+              <a:t>2. 中译俄：</a:t>
+            </a:r>
+          </a:p>
+        </p:txBody>
+      </p:sp>
+      <p:sp>
+        <p:nvSpPr>
+          <p:cNvPr id="9" name="TextBox 8"/>
           <p:cNvSpPr txBox="1"/>
           <p:nvPr/>
         </p:nvSpPr>
         <p:spPr>
           <a:xfrm>
-            <a:off x="7772400" y="6583680"/>
-            <a:ext cx="1188720" cy="274320"/>
+            <a:off x="457200" y="2999232"/>
+            <a:ext cx="8229600" cy="365760"/>
           </a:xfrm>
           <a:prstGeom prst="rect">
             <a:avLst/>
@@ -4457,90 +4297,29 @@
           </a:bodyPr>
           <a:lstStyle/>
           <a:p>
-            <a:pPr algn="r">
-              <a:defRPr sz="1100">
-                <a:solidFill>
-                  <a:srgbClr val="A0A0A0"/>
+            <a:pPr>
+              <a:defRPr sz="1500">
+                <a:solidFill>
+                  <a:srgbClr val="333333"/>
                 </a:solidFill>
               </a:defRPr>
             </a:pPr>
             <a:r>
-              <a:t>Day4/84</a:t>
-            </a:r>
-          </a:p>
-        </p:txBody>
-      </p:sp>
-    </p:spTree>
-  </p:cSld>
-  <p:clrMapOvr>
-    <a:masterClrMapping/>
-  </p:clrMapOvr>
-</p:sld>
-</file>
-
-<file path=ppt/slides/slide5.xml><?xml version="1.0" encoding="utf-8"?>
-<p:sld xmlns:a="http://schemas.openxmlformats.org/drawingml/2006/main" xmlns:p="http://schemas.openxmlformats.org/presentationml/2006/main" xmlns:r="http://schemas.openxmlformats.org/officeDocument/2006/relationships">
-  <p:cSld>
-    <p:spTree>
-      <p:nvGrpSpPr>
-        <p:cNvPr id="1" name=""/>
-        <p:cNvGrpSpPr/>
-        <p:nvPr/>
-      </p:nvGrpSpPr>
-      <p:grpSpPr/>
-      <p:sp>
-        <p:nvSpPr>
-          <p:cNvPr id="2" name="Rectangle 1"/>
-          <p:cNvSpPr/>
-          <p:nvPr/>
-        </p:nvSpPr>
-        <p:spPr>
-          <a:xfrm>
-            <a:off x="0" y="0"/>
-            <a:ext cx="9144000" cy="1280160"/>
-          </a:xfrm>
-          <a:prstGeom prst="rect">
-            <a:avLst/>
-          </a:prstGeom>
-          <a:solidFill>
-            <a:srgbClr val="1E3C72"/>
-          </a:solidFill>
-          <a:ln>
-            <a:noFill/>
-          </a:ln>
-        </p:spPr>
-        <p:style>
-          <a:lnRef idx="1">
-            <a:schemeClr val="accent1"/>
-          </a:lnRef>
-          <a:fillRef idx="3">
-            <a:schemeClr val="accent1"/>
-          </a:fillRef>
-          <a:effectRef idx="2">
-            <a:schemeClr val="accent1"/>
-          </a:effectRef>
-          <a:fontRef idx="minor">
-            <a:schemeClr val="lt1"/>
-          </a:fontRef>
-        </p:style>
-        <p:txBody>
-          <a:bodyPr rtlCol="0" anchor="ctr"/>
-          <a:lstStyle/>
-          <a:p>
-            <a:pPr algn="ctr"/>
-          </a:p>
-        </p:txBody>
-      </p:sp>
-      <p:sp>
-        <p:nvSpPr>
-          <p:cNvPr id="3" name="TextBox 2"/>
+              <a:t>   我用笔写字。</a:t>
+            </a:r>
+          </a:p>
+        </p:txBody>
+      </p:sp>
+      <p:sp>
+        <p:nvSpPr>
+          <p:cNvPr id="10" name="TextBox 9"/>
           <p:cNvSpPr txBox="1"/>
           <p:nvPr/>
         </p:nvSpPr>
         <p:spPr>
           <a:xfrm>
-            <a:off x="457200" y="228600"/>
-            <a:ext cx="8229600" cy="640080"/>
+            <a:off x="457200" y="3383279"/>
+            <a:ext cx="8229600" cy="365760"/>
           </a:xfrm>
           <a:prstGeom prst="rect">
             <a:avLst/>
@@ -4554,27 +4333,27 @@
           <a:lstStyle/>
           <a:p>
             <a:pPr>
-              <a:defRPr sz="3200" b="1">
-                <a:solidFill>
-                  <a:srgbClr val="FFFFFF"/>
+              <a:defRPr sz="1500">
+                <a:solidFill>
+                  <a:srgbClr val="333333"/>
                 </a:solidFill>
               </a:defRPr>
             </a:pPr>
             <a:r>
-              <a:t>四、课后练习</a:t>
-            </a:r>
-          </a:p>
-        </p:txBody>
-      </p:sp>
-      <p:sp>
-        <p:nvSpPr>
-          <p:cNvPr id="4" name="TextBox 3"/>
+              <a:t>   她和朋友一起走。</a:t>
+            </a:r>
+          </a:p>
+        </p:txBody>
+      </p:sp>
+      <p:sp>
+        <p:nvSpPr>
+          <p:cNvPr id="11" name="TextBox 10"/>
           <p:cNvSpPr txBox="1"/>
           <p:nvPr/>
         </p:nvSpPr>
         <p:spPr>
           <a:xfrm>
-            <a:off x="457200" y="777240"/>
+            <a:off x="457200" y="3767328"/>
             <a:ext cx="8229600" cy="365760"/>
           </a:xfrm>
           <a:prstGeom prst="rect">
@@ -4589,28 +4368,28 @@
           <a:lstStyle/>
           <a:p>
             <a:pPr>
-              <a:defRPr sz="1800">
-                <a:solidFill>
-                  <a:srgbClr val="C8DCFF"/>
+              <a:defRPr sz="1500">
+                <a:solidFill>
+                  <a:srgbClr val="333333"/>
                 </a:solidFill>
               </a:defRPr>
             </a:pPr>
             <a:r>
-              <a:t>Uprazhneniya</a:t>
-            </a:r>
-          </a:p>
-        </p:txBody>
-      </p:sp>
-      <p:sp>
-        <p:nvSpPr>
-          <p:cNvPr id="5" name="TextBox 4"/>
+              <a:t>   他站在窗边。</a:t>
+            </a:r>
+          </a:p>
+        </p:txBody>
+      </p:sp>
+      <p:sp>
+        <p:nvSpPr>
+          <p:cNvPr id="12" name="TextBox 11"/>
           <p:cNvSpPr txBox="1"/>
           <p:nvPr/>
         </p:nvSpPr>
         <p:spPr>
           <a:xfrm>
-            <a:off x="457200" y="1463040"/>
-            <a:ext cx="8229600" cy="365760"/>
+            <a:off x="7772400" y="6583680"/>
+            <a:ext cx="1188720" cy="274320"/>
           </a:xfrm>
           <a:prstGeom prst="rect">
             <a:avLst/>
@@ -4623,248 +4402,6 @@
           </a:bodyPr>
           <a:lstStyle/>
           <a:p>
-            <a:pPr>
-              <a:defRPr sz="1500">
-                <a:solidFill>
-                  <a:srgbClr val="333333"/>
-                </a:solidFill>
-              </a:defRPr>
-            </a:pPr>
-            <a:r>
-              <a:t>1. 将下列名词变为第5格：</a:t>
-            </a:r>
-          </a:p>
-        </p:txBody>
-      </p:sp>
-      <p:sp>
-        <p:nvSpPr>
-          <p:cNvPr id="6" name="TextBox 5"/>
-          <p:cNvSpPr txBox="1"/>
-          <p:nvPr/>
-        </p:nvSpPr>
-        <p:spPr>
-          <a:xfrm>
-            <a:off x="457200" y="1847088"/>
-            <a:ext cx="8229600" cy="365760"/>
-          </a:xfrm>
-          <a:prstGeom prst="rect">
-            <a:avLst/>
-          </a:prstGeom>
-          <a:noFill/>
-        </p:spPr>
-        <p:txBody>
-          <a:bodyPr wrap="none">
-            <a:spAutoFit/>
-          </a:bodyPr>
-          <a:lstStyle/>
-          <a:p>
-            <a:pPr>
-              <a:defRPr sz="1500">
-                <a:solidFill>
-                  <a:srgbClr val="333333"/>
-                </a:solidFill>
-              </a:defRPr>
-            </a:pPr>
-            <a:r>
-              <a:t>   dom, kniga, drug, okno</a:t>
-            </a:r>
-          </a:p>
-        </p:txBody>
-      </p:sp>
-      <p:sp>
-        <p:nvSpPr>
-          <p:cNvPr id="7" name="TextBox 6"/>
-          <p:cNvSpPr txBox="1"/>
-          <p:nvPr/>
-        </p:nvSpPr>
-        <p:spPr>
-          <a:xfrm>
-            <a:off x="457200" y="2231136"/>
-            <a:ext cx="8229600" cy="365760"/>
-          </a:xfrm>
-          <a:prstGeom prst="rect">
-            <a:avLst/>
-          </a:prstGeom>
-          <a:noFill/>
-        </p:spPr>
-        <p:txBody>
-          <a:bodyPr wrap="none">
-            <a:spAutoFit/>
-          </a:bodyPr>
-          <a:lstStyle/>
-          <a:p>
-            <a:pPr>
-              <a:defRPr sz="1500">
-                <a:solidFill>
-                  <a:srgbClr val="333333"/>
-                </a:solidFill>
-              </a:defRPr>
-            </a:pPr>
-          </a:p>
-        </p:txBody>
-      </p:sp>
-      <p:sp>
-        <p:nvSpPr>
-          <p:cNvPr id="8" name="TextBox 7"/>
-          <p:cNvSpPr txBox="1"/>
-          <p:nvPr/>
-        </p:nvSpPr>
-        <p:spPr>
-          <a:xfrm>
-            <a:off x="457200" y="2615184"/>
-            <a:ext cx="8229600" cy="365760"/>
-          </a:xfrm>
-          <a:prstGeom prst="rect">
-            <a:avLst/>
-          </a:prstGeom>
-          <a:noFill/>
-        </p:spPr>
-        <p:txBody>
-          <a:bodyPr wrap="none">
-            <a:spAutoFit/>
-          </a:bodyPr>
-          <a:lstStyle/>
-          <a:p>
-            <a:pPr>
-              <a:defRPr sz="1500">
-                <a:solidFill>
-                  <a:srgbClr val="333333"/>
-                </a:solidFill>
-              </a:defRPr>
-            </a:pPr>
-            <a:r>
-              <a:t>2. 中译俄：</a:t>
-            </a:r>
-          </a:p>
-        </p:txBody>
-      </p:sp>
-      <p:sp>
-        <p:nvSpPr>
-          <p:cNvPr id="9" name="TextBox 8"/>
-          <p:cNvSpPr txBox="1"/>
-          <p:nvPr/>
-        </p:nvSpPr>
-        <p:spPr>
-          <a:xfrm>
-            <a:off x="457200" y="2999232"/>
-            <a:ext cx="8229600" cy="365760"/>
-          </a:xfrm>
-          <a:prstGeom prst="rect">
-            <a:avLst/>
-          </a:prstGeom>
-          <a:noFill/>
-        </p:spPr>
-        <p:txBody>
-          <a:bodyPr wrap="none">
-            <a:spAutoFit/>
-          </a:bodyPr>
-          <a:lstStyle/>
-          <a:p>
-            <a:pPr>
-              <a:defRPr sz="1500">
-                <a:solidFill>
-                  <a:srgbClr val="333333"/>
-                </a:solidFill>
-              </a:defRPr>
-            </a:pPr>
-            <a:r>
-              <a:t>   我用笔写字。</a:t>
-            </a:r>
-          </a:p>
-        </p:txBody>
-      </p:sp>
-      <p:sp>
-        <p:nvSpPr>
-          <p:cNvPr id="10" name="TextBox 9"/>
-          <p:cNvSpPr txBox="1"/>
-          <p:nvPr/>
-        </p:nvSpPr>
-        <p:spPr>
-          <a:xfrm>
-            <a:off x="457200" y="3383279"/>
-            <a:ext cx="8229600" cy="365760"/>
-          </a:xfrm>
-          <a:prstGeom prst="rect">
-            <a:avLst/>
-          </a:prstGeom>
-          <a:noFill/>
-        </p:spPr>
-        <p:txBody>
-          <a:bodyPr wrap="none">
-            <a:spAutoFit/>
-          </a:bodyPr>
-          <a:lstStyle/>
-          <a:p>
-            <a:pPr>
-              <a:defRPr sz="1500">
-                <a:solidFill>
-                  <a:srgbClr val="333333"/>
-                </a:solidFill>
-              </a:defRPr>
-            </a:pPr>
-            <a:r>
-              <a:t>   她和朋友一起走。</a:t>
-            </a:r>
-          </a:p>
-        </p:txBody>
-      </p:sp>
-      <p:sp>
-        <p:nvSpPr>
-          <p:cNvPr id="11" name="TextBox 10"/>
-          <p:cNvSpPr txBox="1"/>
-          <p:nvPr/>
-        </p:nvSpPr>
-        <p:spPr>
-          <a:xfrm>
-            <a:off x="457200" y="3767328"/>
-            <a:ext cx="8229600" cy="365760"/>
-          </a:xfrm>
-          <a:prstGeom prst="rect">
-            <a:avLst/>
-          </a:prstGeom>
-          <a:noFill/>
-        </p:spPr>
-        <p:txBody>
-          <a:bodyPr wrap="none">
-            <a:spAutoFit/>
-          </a:bodyPr>
-          <a:lstStyle/>
-          <a:p>
-            <a:pPr>
-              <a:defRPr sz="1500">
-                <a:solidFill>
-                  <a:srgbClr val="333333"/>
-                </a:solidFill>
-              </a:defRPr>
-            </a:pPr>
-            <a:r>
-              <a:t>   他站在窗边。</a:t>
-            </a:r>
-          </a:p>
-        </p:txBody>
-      </p:sp>
-      <p:sp>
-        <p:nvSpPr>
-          <p:cNvPr id="12" name="TextBox 11"/>
-          <p:cNvSpPr txBox="1"/>
-          <p:nvPr/>
-        </p:nvSpPr>
-        <p:spPr>
-          <a:xfrm>
-            <a:off x="7772400" y="6583680"/>
-            <a:ext cx="1188720" cy="274320"/>
-          </a:xfrm>
-          <a:prstGeom prst="rect">
-            <a:avLst/>
-          </a:prstGeom>
-          <a:noFill/>
-        </p:spPr>
-        <p:txBody>
-          <a:bodyPr wrap="none">
-            <a:spAutoFit/>
-          </a:bodyPr>
-          <a:lstStyle/>
-          <a:p>
             <a:pPr algn="r">
               <a:defRPr sz="1100">
                 <a:solidFill>
@@ -4873,7 +4410,7 @@
               </a:defRPr>
             </a:pPr>
             <a:r>
-              <a:t>Day4/84</a:t>
+              <a:t>День 4/84</a:t>
             </a:r>
           </a:p>
         </p:txBody>
